--- a/youth_sync.pptx
+++ b/youth_sync.pptx
@@ -2289,20 +2289,31 @@
               <a:buNone/>
             </a:pPr>
             <a:r>
-              <a:rPr lang="en-US" sz="1200" dirty="0" err="1">
-                <a:solidFill>
-                  <a:srgbClr val="94A3B8"/>
-                </a:solidFill>
-                <a:latin typeface="Calibri" pitchFamily="34" charset="0"/>
-                <a:ea typeface="Calibri" pitchFamily="34" charset="-122"/>
-                <a:cs typeface="Calibri" pitchFamily="34" charset="-120"/>
-              </a:rPr>
-              <a:t>복잡한</a:t>
-            </a:r>
-            <a:r>
-              <a:rPr lang="en-US" sz="1200" dirty="0">
-                <a:solidFill>
-                  <a:srgbClr val="94A3B8"/>
+              <a:rPr lang="en-US" sz="1200" dirty="0" err="1" smtClean="0">
+                <a:solidFill>
+                  <a:schemeClr val="bg1"/>
+                </a:solidFill>
+                <a:latin typeface="Calibri" pitchFamily="34" charset="0"/>
+                <a:ea typeface="Calibri" pitchFamily="34" charset="-122"/>
+                <a:cs typeface="Calibri" pitchFamily="34" charset="-120"/>
+              </a:rPr>
+              <a:t>복잡</a:t>
+            </a:r>
+            <a:r>
+              <a:rPr lang="ko-KR" altLang="en-US" sz="1200" dirty="0" smtClean="0">
+                <a:solidFill>
+                  <a:schemeClr val="bg1"/>
+                </a:solidFill>
+                <a:latin typeface="Calibri" pitchFamily="34" charset="0"/>
+                <a:ea typeface="Calibri" pitchFamily="34" charset="-122"/>
+                <a:cs typeface="Calibri" pitchFamily="34" charset="-120"/>
+              </a:rPr>
+              <a:t>하고 흩어져 있는</a:t>
+            </a:r>
+            <a:r>
+              <a:rPr lang="en-US" sz="1200" dirty="0" smtClean="0">
+                <a:solidFill>
+                  <a:schemeClr val="bg1"/>
                 </a:solidFill>
                 <a:latin typeface="Calibri" pitchFamily="34" charset="0"/>
                 <a:ea typeface="Calibri" pitchFamily="34" charset="-122"/>
@@ -2313,7 +2324,7 @@
             <a:r>
               <a:rPr lang="en-US" sz="1200" dirty="0" err="1" smtClean="0">
                 <a:solidFill>
-                  <a:srgbClr val="94A3B8"/>
+                  <a:schemeClr val="bg1"/>
                 </a:solidFill>
                 <a:latin typeface="Calibri" pitchFamily="34" charset="0"/>
                 <a:ea typeface="Calibri" pitchFamily="34" charset="-122"/>
@@ -2324,7 +2335,7 @@
             <a:r>
               <a:rPr lang="ko-KR" altLang="en-US" sz="1200" dirty="0" smtClean="0">
                 <a:solidFill>
-                  <a:srgbClr val="94A3B8"/>
+                  <a:schemeClr val="bg1"/>
                 </a:solidFill>
                 <a:latin typeface="Calibri" pitchFamily="34" charset="0"/>
                 <a:ea typeface="Calibri" pitchFamily="34" charset="-122"/>
@@ -2335,7 +2346,7 @@
             <a:r>
               <a:rPr lang="en-US" sz="1200" dirty="0" smtClean="0">
                 <a:solidFill>
-                  <a:srgbClr val="94A3B8"/>
+                  <a:schemeClr val="bg1"/>
                 </a:solidFill>
                 <a:latin typeface="Calibri" pitchFamily="34" charset="0"/>
                 <a:ea typeface="Calibri" pitchFamily="34" charset="-122"/>
@@ -2354,7 +2365,7 @@
             <a:r>
               <a:rPr lang="en-US" sz="1200" dirty="0" err="1" smtClean="0">
                 <a:solidFill>
-                  <a:srgbClr val="94A3B8"/>
+                  <a:schemeClr val="bg1"/>
                 </a:solidFill>
                 <a:latin typeface="Calibri" pitchFamily="34" charset="0"/>
                 <a:ea typeface="Calibri" pitchFamily="34" charset="-122"/>
@@ -2363,13 +2374,25 @@
               <a:t>정보를</a:t>
             </a:r>
             <a:r>
-              <a:rPr lang="en-US" sz="1200" dirty="0"/>
+              <a:rPr lang="en-US" sz="1200" dirty="0">
+                <a:solidFill>
+                  <a:schemeClr val="bg1"/>
+                </a:solidFill>
+              </a:rPr>
               <a:t> </a:t>
             </a:r>
             <a:r>
+              <a:rPr lang="ko-KR" altLang="en-US" sz="1200" dirty="0" smtClean="0">
+                <a:solidFill>
+                  <a:schemeClr val="bg1"/>
+                </a:solidFill>
+              </a:rPr>
+              <a:t>통합하여 </a:t>
+            </a:r>
+            <a:r>
               <a:rPr lang="en-US" sz="1200" dirty="0" err="1" smtClean="0">
                 <a:solidFill>
-                  <a:srgbClr val="94A3B8"/>
+                  <a:schemeClr val="bg1"/>
                 </a:solidFill>
                 <a:latin typeface="Calibri" pitchFamily="34" charset="0"/>
                 <a:ea typeface="Calibri" pitchFamily="34" charset="-122"/>
@@ -2380,7 +2403,7 @@
             <a:r>
               <a:rPr lang="en-US" sz="1200" dirty="0" smtClean="0">
                 <a:solidFill>
-                  <a:srgbClr val="94A3B8"/>
+                  <a:schemeClr val="bg1"/>
                 </a:solidFill>
                 <a:latin typeface="Calibri" pitchFamily="34" charset="0"/>
                 <a:ea typeface="Calibri" pitchFamily="34" charset="-122"/>
@@ -2391,7 +2414,7 @@
             <a:r>
               <a:rPr lang="en-US" sz="1200" dirty="0">
                 <a:solidFill>
-                  <a:srgbClr val="94A3B8"/>
+                  <a:schemeClr val="bg1"/>
                 </a:solidFill>
                 <a:latin typeface="Calibri" pitchFamily="34" charset="0"/>
                 <a:ea typeface="Calibri" pitchFamily="34" charset="-122"/>
@@ -2399,7 +2422,11 @@
               </a:rPr>
               <a:t>쉽게 접근할 수 있도록</a:t>
             </a:r>
-            <a:endParaRPr lang="en-US" sz="1200" dirty="0"/>
+            <a:endParaRPr lang="en-US" sz="1200" dirty="0">
+              <a:solidFill>
+                <a:schemeClr val="bg1"/>
+              </a:solidFill>
+            </a:endParaRPr>
           </a:p>
           <a:p>
             <a:pPr marL="0" indent="0">
@@ -2411,7 +2438,7 @@
             <a:r>
               <a:rPr lang="en-US" sz="1200" dirty="0">
                 <a:solidFill>
-                  <a:srgbClr val="94A3B8"/>
+                  <a:schemeClr val="bg1"/>
                 </a:solidFill>
                 <a:latin typeface="Calibri" pitchFamily="34" charset="0"/>
                 <a:ea typeface="Calibri" pitchFamily="34" charset="-122"/>
@@ -2419,7 +2446,11 @@
               </a:rPr>
               <a:t>AI 기반 맞춤 안내 서비스를</a:t>
             </a:r>
-            <a:endParaRPr lang="en-US" sz="1200" dirty="0"/>
+            <a:endParaRPr lang="en-US" sz="1200" dirty="0">
+              <a:solidFill>
+                <a:schemeClr val="bg1"/>
+              </a:solidFill>
+            </a:endParaRPr>
           </a:p>
           <a:p>
             <a:pPr marL="0" indent="0">
@@ -2431,7 +2462,7 @@
             <a:r>
               <a:rPr lang="en-US" sz="1200" dirty="0">
                 <a:solidFill>
-                  <a:srgbClr val="94A3B8"/>
+                  <a:schemeClr val="bg1"/>
                 </a:solidFill>
                 <a:latin typeface="Calibri" pitchFamily="34" charset="0"/>
                 <a:ea typeface="Calibri" pitchFamily="34" charset="-122"/>
@@ -2439,7 +2470,11 @@
               </a:rPr>
               <a:t>구축합니다.</a:t>
             </a:r>
-            <a:endParaRPr lang="en-US" sz="1200" dirty="0"/>
+            <a:endParaRPr lang="en-US" sz="1200" dirty="0">
+              <a:solidFill>
+                <a:schemeClr val="bg1"/>
+              </a:solidFill>
+            </a:endParaRPr>
           </a:p>
         </p:txBody>
       </p:sp>
@@ -4262,7 +4297,7 @@
         </p:nvSpPr>
         <p:spPr>
           <a:xfrm>
-            <a:off x="7351776" y="1463040"/>
+            <a:off x="7336034" y="1646373"/>
             <a:ext cx="731520" cy="731520"/>
           </a:xfrm>
           <a:prstGeom prst="ellipse">
@@ -4282,7 +4317,7 @@
         </p:nvSpPr>
         <p:spPr>
           <a:xfrm>
-            <a:off x="7351776" y="1463040"/>
+            <a:off x="7336034" y="1644849"/>
             <a:ext cx="731520" cy="731520"/>
           </a:xfrm>
           <a:prstGeom prst="rect">
@@ -4299,55 +4334,20 @@
               <a:buNone/>
             </a:pPr>
             <a:r>
-              <a:rPr lang="ko-KR" altLang="en-US" sz="1200" b="1" dirty="0" smtClean="0">
-                <a:solidFill>
-                  <a:srgbClr val="FFFFFF"/>
-                </a:solidFill>
-                <a:latin typeface="Calibri" pitchFamily="34" charset="0"/>
-                <a:cs typeface="Calibri" pitchFamily="34" charset="-120"/>
-              </a:rPr>
-              <a:t>김준서</a:t>
-            </a:r>
-            <a:endParaRPr lang="en-US" sz="1200" dirty="0"/>
-          </a:p>
-        </p:txBody>
-      </p:sp>
-      <p:sp>
-        <p:nvSpPr>
-          <p:cNvPr id="40" name="Text 38"/>
-          <p:cNvSpPr/>
-          <p:nvPr/>
-        </p:nvSpPr>
-        <p:spPr>
-          <a:xfrm>
-            <a:off x="6986016" y="2331720"/>
-            <a:ext cx="1463040" cy="402336"/>
-          </a:xfrm>
-          <a:prstGeom prst="rect">
-            <a:avLst/>
-          </a:prstGeom>
-          <a:noFill/>
-          <a:ln/>
-        </p:spPr>
-        <p:txBody>
-          <a:bodyPr wrap="square" lIns="0" tIns="0" rIns="0" bIns="0" rtlCol="0" anchor="ctr"/>
-          <a:lstStyle/>
-          <a:p>
-            <a:pPr marL="0" indent="0" algn="ctr">
-              <a:buNone/>
-            </a:pPr>
-            <a:r>
-              <a:rPr lang="en-US" sz="1300" b="1" dirty="0">
-                <a:solidFill>
-                  <a:srgbClr val="FFFFFF"/>
-                </a:solidFill>
-                <a:latin typeface="Calibri" pitchFamily="34" charset="0"/>
-                <a:ea typeface="Calibri" pitchFamily="34" charset="-122"/>
-                <a:cs typeface="Calibri" pitchFamily="34" charset="-120"/>
-              </a:rPr>
-              <a:t>백엔드</a:t>
-            </a:r>
-            <a:endParaRPr lang="en-US" sz="1300" dirty="0"/>
+              <a:rPr lang="en-US" altLang="ko-KR" sz="2400" b="1" dirty="0" smtClean="0">
+                <a:solidFill>
+                  <a:schemeClr val="bg1"/>
+                </a:solidFill>
+                <a:latin typeface="Calibri" pitchFamily="34" charset="0"/>
+                <a:cs typeface="Calibri" pitchFamily="34" charset="-120"/>
+              </a:rPr>
+              <a:t>E</a:t>
+            </a:r>
+            <a:endParaRPr lang="en-US" sz="2400" dirty="0">
+              <a:solidFill>
+                <a:schemeClr val="bg1"/>
+              </a:solidFill>
+            </a:endParaRPr>
           </a:p>
         </p:txBody>
       </p:sp>
@@ -4436,19 +4436,141 @@
           <a:bodyPr wrap="square" lIns="0" tIns="0" rIns="0" bIns="0" rtlCol="0" anchor="t"/>
           <a:lstStyle/>
           <a:p>
-            <a:pPr marL="0" indent="0">
+            <a:pPr marL="171450" indent="-171450">
               <a:lnSpc>
                 <a:spcPct val="130000"/>
               </a:lnSpc>
-              <a:buNone/>
-            </a:pPr>
-            <a:r>
-              <a:rPr lang="en-US" sz="950" dirty="0">
-                <a:latin typeface="Calibri" pitchFamily="34" charset="0"/>
-                <a:ea typeface="Calibri" pitchFamily="34" charset="-122"/>
-                <a:cs typeface="Calibri" pitchFamily="34" charset="-120"/>
-              </a:rPr>
-              <a:t>A/B/C/D 레이어를 연결하는 FastAPI 서버 구축, 엔드포인트 설계 및 금요일 통합 시연 총괄</a:t>
+              <a:buFontTx/>
+              <a:buChar char="-"/>
+            </a:pPr>
+            <a:r>
+              <a:rPr lang="ko-KR" altLang="en-US" sz="950" dirty="0" smtClean="0">
+                <a:latin typeface="Calibri" pitchFamily="34" charset="0"/>
+                <a:ea typeface="Calibri" pitchFamily="34" charset="-122"/>
+                <a:cs typeface="Calibri" pitchFamily="34" charset="-120"/>
+              </a:rPr>
+              <a:t>세션 </a:t>
+            </a:r>
+            <a:r>
+              <a:rPr lang="ko-KR" altLang="en-US" sz="950" dirty="0">
+                <a:latin typeface="Calibri" pitchFamily="34" charset="0"/>
+                <a:ea typeface="Calibri" pitchFamily="34" charset="-122"/>
+                <a:cs typeface="Calibri" pitchFamily="34" charset="-120"/>
+              </a:rPr>
+              <a:t>기반 상태 관리 및 </a:t>
+            </a:r>
+            <a:r>
+              <a:rPr lang="en-US" altLang="ko-KR" sz="950" dirty="0">
+                <a:latin typeface="Calibri" pitchFamily="34" charset="0"/>
+                <a:ea typeface="Calibri" pitchFamily="34" charset="-122"/>
+                <a:cs typeface="Calibri" pitchFamily="34" charset="-120"/>
+              </a:rPr>
+              <a:t>API </a:t>
+            </a:r>
+            <a:r>
+              <a:rPr lang="ko-KR" altLang="en-US" sz="950" dirty="0">
+                <a:latin typeface="Calibri" pitchFamily="34" charset="0"/>
+                <a:ea typeface="Calibri" pitchFamily="34" charset="-122"/>
+                <a:cs typeface="Calibri" pitchFamily="34" charset="-120"/>
+              </a:rPr>
+              <a:t>아키텍처 </a:t>
+            </a:r>
+            <a:r>
+              <a:rPr lang="ko-KR" altLang="en-US" sz="950" dirty="0" smtClean="0">
+                <a:latin typeface="Calibri" pitchFamily="34" charset="0"/>
+                <a:ea typeface="Calibri" pitchFamily="34" charset="-122"/>
+                <a:cs typeface="Calibri" pitchFamily="34" charset="-120"/>
+              </a:rPr>
+              <a:t>설계</a:t>
+            </a:r>
+            <a:endParaRPr lang="en-US" altLang="ko-KR" sz="950" dirty="0" smtClean="0">
+              <a:latin typeface="Calibri" pitchFamily="34" charset="0"/>
+              <a:ea typeface="Calibri" pitchFamily="34" charset="-122"/>
+              <a:cs typeface="Calibri" pitchFamily="34" charset="-120"/>
+            </a:endParaRPr>
+          </a:p>
+          <a:p>
+            <a:pPr marL="171450" indent="-171450">
+              <a:lnSpc>
+                <a:spcPct val="130000"/>
+              </a:lnSpc>
+              <a:buFontTx/>
+              <a:buChar char="-"/>
+            </a:pPr>
+            <a:r>
+              <a:rPr lang="en-US" sz="950" dirty="0" err="1" smtClean="0">
+                <a:latin typeface="Calibri" pitchFamily="34" charset="0"/>
+                <a:cs typeface="Calibri" pitchFamily="34" charset="-120"/>
+              </a:rPr>
+              <a:t>FastAPI</a:t>
+            </a:r>
+            <a:r>
+              <a:rPr lang="en-US" sz="950" dirty="0" smtClean="0">
+                <a:latin typeface="Calibri" pitchFamily="34" charset="0"/>
+                <a:cs typeface="Calibri" pitchFamily="34" charset="-120"/>
+              </a:rPr>
+              <a:t> </a:t>
+            </a:r>
+            <a:r>
+              <a:rPr lang="ko-KR" altLang="en-US" sz="950" dirty="0" smtClean="0">
+                <a:latin typeface="Calibri" pitchFamily="34" charset="0"/>
+                <a:cs typeface="Calibri" pitchFamily="34" charset="-120"/>
+              </a:rPr>
+              <a:t>서버 구축 및 </a:t>
+            </a:r>
+            <a:r>
+              <a:rPr lang="en-US" altLang="ko-KR" sz="950" dirty="0" err="1" smtClean="0">
+                <a:latin typeface="Calibri" pitchFamily="34" charset="0"/>
+                <a:cs typeface="Calibri" pitchFamily="34" charset="-120"/>
+              </a:rPr>
+              <a:t>Redis</a:t>
+            </a:r>
+            <a:r>
+              <a:rPr lang="en-US" altLang="ko-KR" sz="950" dirty="0" smtClean="0">
+                <a:latin typeface="Calibri" pitchFamily="34" charset="0"/>
+                <a:cs typeface="Calibri" pitchFamily="34" charset="-120"/>
+              </a:rPr>
+              <a:t> </a:t>
+            </a:r>
+            <a:r>
+              <a:rPr lang="ko-KR" altLang="en-US" sz="950" dirty="0" smtClean="0">
+                <a:latin typeface="Calibri" pitchFamily="34" charset="0"/>
+                <a:cs typeface="Calibri" pitchFamily="34" charset="-120"/>
+              </a:rPr>
+              <a:t>기반 세션 관리 구현</a:t>
+            </a:r>
+            <a:endParaRPr lang="en-US" altLang="ko-KR" sz="950" dirty="0" smtClean="0">
+              <a:latin typeface="Calibri" pitchFamily="34" charset="0"/>
+              <a:cs typeface="Calibri" pitchFamily="34" charset="-120"/>
+            </a:endParaRPr>
+          </a:p>
+          <a:p>
+            <a:pPr marL="171450" indent="-171450">
+              <a:lnSpc>
+                <a:spcPct val="130000"/>
+              </a:lnSpc>
+              <a:buFontTx/>
+              <a:buChar char="-"/>
+            </a:pPr>
+            <a:r>
+              <a:rPr lang="en-US" sz="950" dirty="0" smtClean="0"/>
+              <a:t>AI </a:t>
+            </a:r>
+            <a:r>
+              <a:rPr lang="ko-KR" altLang="en-US" sz="950" dirty="0" smtClean="0"/>
+              <a:t>모듈 </a:t>
+            </a:r>
+            <a:r>
+              <a:rPr lang="en-US" altLang="ko-KR" sz="950" dirty="0" smtClean="0"/>
+              <a:t>(</a:t>
+            </a:r>
+            <a:r>
+              <a:rPr lang="en-US" altLang="ko-KR" sz="950" dirty="0" smtClean="0"/>
+              <a:t>A/B/C/D) </a:t>
+            </a:r>
+            <a:r>
+              <a:rPr lang="ko-KR" altLang="en-US" sz="950" dirty="0" smtClean="0"/>
+              <a:t>통합 및 데이터 흐름 구현</a:t>
             </a:r>
             <a:endParaRPr lang="en-US" sz="950" dirty="0"/>
           </a:p>
@@ -4571,36 +4693,6 @@
               <a:t>D</a:t>
             </a:r>
             <a:endParaRPr lang="ko-KR" altLang="en-US" dirty="0"/>
-          </a:p>
-        </p:txBody>
-      </p:sp>
-      <p:sp>
-        <p:nvSpPr>
-          <p:cNvPr id="49" name="TextBox 48"/>
-          <p:cNvSpPr txBox="1"/>
-          <p:nvPr/>
-        </p:nvSpPr>
-        <p:spPr>
-          <a:xfrm>
-            <a:off x="7347609" y="2318424"/>
-            <a:ext cx="735687" cy="307777"/>
-          </a:xfrm>
-          <a:prstGeom prst="rect">
-            <a:avLst/>
-          </a:prstGeom>
-          <a:noFill/>
-        </p:spPr>
-        <p:txBody>
-          <a:bodyPr wrap="square" rtlCol="0">
-            <a:spAutoFit/>
-          </a:bodyPr>
-          <a:lstStyle/>
-          <a:p>
-            <a:r>
-              <a:rPr lang="ko-KR" altLang="en-US" sz="1400" dirty="0" err="1" smtClean="0"/>
-              <a:t>백엔드</a:t>
-            </a:r>
-            <a:endParaRPr lang="ko-KR" altLang="en-US" sz="1400" dirty="0"/>
           </a:p>
         </p:txBody>
       </p:sp>
@@ -9703,7 +9795,7 @@
         <p:spPr>
           <a:xfrm>
             <a:off x="7443216" y="2359152"/>
-            <a:ext cx="1554480" cy="2578608"/>
+            <a:ext cx="1554480" cy="1988730"/>
           </a:xfrm>
           <a:prstGeom prst="rect">
             <a:avLst/>
@@ -9715,111 +9807,89 @@
           <a:bodyPr wrap="square" lIns="0" tIns="0" rIns="0" bIns="0" rtlCol="0" anchor="t"/>
           <a:lstStyle/>
           <a:p>
-            <a:pPr marL="0" indent="0">
+            <a:pPr algn="ctr">
               <a:lnSpc>
                 <a:spcPct val="135000"/>
               </a:lnSpc>
-              <a:buNone/>
-            </a:pPr>
-            <a:r>
-              <a:rPr lang="en-US" sz="1000" dirty="0">
-                <a:solidFill>
-                  <a:srgbClr val="475569"/>
-                </a:solidFill>
-                <a:latin typeface="Calibri" pitchFamily="34" charset="0"/>
-                <a:ea typeface="Calibri" pitchFamily="34" charset="-122"/>
-                <a:cs typeface="Calibri" pitchFamily="34" charset="-120"/>
-              </a:rPr>
-              <a:t>여기에 업그레이드 내용을</a:t>
-            </a:r>
-            <a:endParaRPr lang="en-US" sz="1000" dirty="0"/>
-          </a:p>
-          <a:p>
-            <a:pPr marL="0" indent="0">
-              <a:lnSpc>
-                <a:spcPct val="135000"/>
-              </a:lnSpc>
-              <a:buNone/>
-            </a:pPr>
-            <a:r>
-              <a:rPr lang="en-US" sz="1000" dirty="0">
-                <a:solidFill>
-                  <a:srgbClr val="475569"/>
-                </a:solidFill>
-                <a:latin typeface="Calibri" pitchFamily="34" charset="0"/>
-                <a:ea typeface="Calibri" pitchFamily="34" charset="-122"/>
-                <a:cs typeface="Calibri" pitchFamily="34" charset="-120"/>
-              </a:rPr>
-              <a:t>직접 작성해 주세요.</a:t>
-            </a:r>
-            <a:endParaRPr lang="en-US" sz="1000" dirty="0"/>
-          </a:p>
-          <a:p>
-            <a:pPr marL="0" indent="0">
-              <a:lnSpc>
-                <a:spcPct val="135000"/>
-              </a:lnSpc>
-              <a:buNone/>
-            </a:pPr>
-            <a:endParaRPr lang="en-US" sz="1000" dirty="0"/>
-          </a:p>
-          <a:p>
-            <a:pPr marL="0" indent="0">
-              <a:lnSpc>
-                <a:spcPct val="135000"/>
-              </a:lnSpc>
-              <a:buNone/>
-            </a:pPr>
-            <a:r>
-              <a:rPr lang="en-US" sz="1000" dirty="0">
-                <a:solidFill>
-                  <a:srgbClr val="475569"/>
-                </a:solidFill>
-                <a:latin typeface="Calibri" pitchFamily="34" charset="0"/>
-                <a:ea typeface="Calibri" pitchFamily="34" charset="-122"/>
-                <a:cs typeface="Calibri" pitchFamily="34" charset="-120"/>
-              </a:rPr>
-              <a:t>개선한 기능, 성능 향상,</a:t>
-            </a:r>
-            <a:endParaRPr lang="en-US" sz="1000" dirty="0"/>
-          </a:p>
-          <a:p>
-            <a:pPr marL="0" indent="0">
-              <a:lnSpc>
-                <a:spcPct val="135000"/>
-              </a:lnSpc>
-              <a:buNone/>
-            </a:pPr>
-            <a:r>
-              <a:rPr lang="en-US" sz="1000" dirty="0">
-                <a:solidFill>
-                  <a:srgbClr val="475569"/>
-                </a:solidFill>
-                <a:latin typeface="Calibri" pitchFamily="34" charset="0"/>
-                <a:ea typeface="Calibri" pitchFamily="34" charset="-122"/>
-                <a:cs typeface="Calibri" pitchFamily="34" charset="-120"/>
-              </a:rPr>
-              <a:t>새로 추가한 로직 등을</a:t>
-            </a:r>
-            <a:endParaRPr lang="en-US" sz="1000" dirty="0"/>
-          </a:p>
-          <a:p>
-            <a:pPr marL="0" indent="0">
-              <a:lnSpc>
-                <a:spcPct val="135000"/>
-              </a:lnSpc>
-              <a:buNone/>
-            </a:pPr>
-            <a:r>
-              <a:rPr lang="en-US" sz="1000" dirty="0">
-                <a:solidFill>
-                  <a:srgbClr val="475569"/>
-                </a:solidFill>
-                <a:latin typeface="Calibri" pitchFamily="34" charset="0"/>
-                <a:ea typeface="Calibri" pitchFamily="34" charset="-122"/>
-                <a:cs typeface="Calibri" pitchFamily="34" charset="-120"/>
-              </a:rPr>
-              <a:t>자유롭게 적어주세요.</a:t>
+            </a:pPr>
+            <a:r>
+              <a:rPr lang="ko-KR" altLang="en-US" sz="1000" dirty="0" smtClean="0">
+                <a:latin typeface="Calibri" pitchFamily="34" charset="0"/>
+                <a:ea typeface="Calibri" pitchFamily="34" charset="-122"/>
+                <a:cs typeface="Calibri" pitchFamily="34" charset="-120"/>
+              </a:rPr>
+              <a:t>이번 프로젝트에서는 </a:t>
+            </a:r>
+            <a:r>
+              <a:rPr lang="ko-KR" altLang="en-US" sz="1000" dirty="0"/>
+              <a:t>정적 데이터 처리 중심의 </a:t>
+            </a:r>
+            <a:r>
+              <a:rPr lang="ko-KR" altLang="en-US" sz="1000" dirty="0" err="1"/>
+              <a:t>백엔드에서</a:t>
+            </a:r>
+            <a:r>
+              <a:rPr lang="ko-KR" altLang="en-US" sz="1000" dirty="0"/>
+              <a:t> 벗어나</a:t>
+            </a:r>
+            <a:r>
+              <a:rPr lang="en-US" altLang="ko-KR" sz="1000" dirty="0"/>
+              <a:t>,</a:t>
+            </a:r>
+            <a:br>
+              <a:rPr lang="en-US" altLang="ko-KR" sz="1000" dirty="0"/>
+            </a:br>
+            <a:r>
+              <a:rPr lang="en-US" altLang="ko-KR" sz="1000" dirty="0" err="1"/>
+              <a:t>Redis</a:t>
+            </a:r>
+            <a:r>
+              <a:rPr lang="en-US" altLang="ko-KR" sz="1000" dirty="0"/>
+              <a:t> </a:t>
+            </a:r>
+            <a:r>
+              <a:rPr lang="ko-KR" altLang="en-US" sz="1000" dirty="0"/>
+              <a:t>기반 세션 및 상태 관리 구조를 </a:t>
+            </a:r>
+            <a:r>
+              <a:rPr lang="ko-KR" altLang="en-US" sz="1000" dirty="0" smtClean="0"/>
+              <a:t>설계 후</a:t>
+            </a:r>
+            <a:r>
+              <a:rPr lang="ko-KR" altLang="en-US" sz="1000" dirty="0"/>
+              <a:t/>
+            </a:r>
+            <a:br>
+              <a:rPr lang="ko-KR" altLang="en-US" sz="1000" dirty="0"/>
+            </a:br>
+            <a:r>
+              <a:rPr lang="ko-KR" altLang="en-US" sz="1000" dirty="0"/>
+              <a:t>실시간 서비스 아키텍처로 </a:t>
+            </a:r>
+            <a:r>
+              <a:rPr lang="ko-KR" altLang="en-US" sz="1000" dirty="0" smtClean="0"/>
+              <a:t>확장하며</a:t>
+            </a:r>
+            <a:r>
+              <a:rPr lang="en-US" altLang="ko-KR" sz="1000" dirty="0" smtClean="0">
+                <a:latin typeface="Calibri" pitchFamily="34" charset="0"/>
+                <a:cs typeface="Calibri" pitchFamily="34" charset="-120"/>
+              </a:rPr>
+              <a:t>, </a:t>
+            </a:r>
+            <a:r>
+              <a:rPr lang="ko-KR" altLang="en-US" sz="1000" dirty="0" smtClean="0">
+                <a:latin typeface="Calibri" pitchFamily="34" charset="0"/>
+                <a:cs typeface="Calibri" pitchFamily="34" charset="-120"/>
+              </a:rPr>
+              <a:t>서비스 구조에 대한 이해도를 한 단계 끌어올렸습니다</a:t>
+            </a:r>
+            <a:r>
+              <a:rPr lang="en-US" altLang="ko-KR" sz="1000" dirty="0" smtClean="0">
+                <a:latin typeface="Calibri" pitchFamily="34" charset="0"/>
+                <a:cs typeface="Calibri" pitchFamily="34" charset="-120"/>
+              </a:rPr>
+              <a:t>.</a:t>
             </a:r>
             <a:endParaRPr lang="en-US" sz="1000" dirty="0"/>
           </a:p>
